--- a/projects/templates/template_pitch_deck/output/pptx/template_template_pitch_short.pptx
+++ b/projects/templates/template_pitch_deck/output/pptx/template_template_pitch_short.pptx
@@ -4803,7 +4803,7 @@
               </a:defRPr>
             </a:pPr>
             <a:r>
-              <a:t>• One of 24 public exemplar templates in the same monorepo, each</a:t>
+              <a:t>• One of 25 public exemplar templates in the same monorepo, each</a:t>
             </a:r>
             <a:br/>
             <a:r>
@@ -5026,7 +5026,7 @@
               </a:defRPr>
             </a:pPr>
             <a:r>
-              <a:t>• src/template_template/introspection.py scans infrastructure/ modules, the</a:t>
+              <a:t>• src/template_template/core/introspection.py scans infrastructure/ modules, the</a:t>
             </a:r>
             <a:br/>
             <a:r>
@@ -5431,7 +5431,7 @@
                   <a:srgbClr val="B3131A"/>
                 </a:solidFill>
               </a:rPr>
-              <a:t>147 tests</a:t>
+              <a:t>153 tests</a:t>
             </a:r>
           </a:p>
         </p:txBody>
@@ -5464,7 +5464,7 @@
                   <a:srgbClr val="0A0A0A"/>
                 </a:solidFill>
               </a:rPr>
-              <a:t>97.66% coverage on template_template's own source — the same gate every exemplar in the repo must pass.</a:t>
+              <a:t>97.07% coverage on template_template's own source — the same gate every exemplar in the repo must pass.</a:t>
             </a:r>
           </a:p>
         </p:txBody>
@@ -5655,7 +5655,7 @@
         <p:spPr>
           <a:xfrm>
             <a:off x="502920" y="1070305"/>
-            <a:ext cx="8138160" cy="1383410"/>
+            <a:ext cx="8138160" cy="1116711"/>
           </a:xfrm>
           <a:prstGeom prst="rect">
             <a:avLst/>
@@ -5683,15 +5683,11 @@
               </a:defRPr>
             </a:pPr>
             <a:r>
-              <a:t>• Concept DOI 10.5281/zenodo.20419007, 9 durable publication records already</a:t>
+              <a:t>• Concept DOI 10.5281/zenodo.20419007. Intended v2.0.0 is unreleased; prior</a:t>
             </a:r>
             <a:br/>
             <a:r>
-              <a:t>on file: Zenodo, GitHub, PyPI (sandbox), IPFS, Software Heritage, GitHub</a:t>
-            </a:r>
-            <a:br/>
-            <a:r>
-              <a:t>Pages, Netlify, Hugging Face, OSF.</a:t>
+              <a:t>v1.0.9 has 9 historical publication references.</a:t>
             </a:r>
           </a:p>
           <a:p>
@@ -5979,7 +5975,7 @@
               </a:defRPr>
             </a:pPr>
             <a:r>
-              <a:t>• The pattern generalizes across the whole projects/templates/ folder — all 24</a:t>
+              <a:t>• The pattern generalizes across the whole projects/templates/ folder — all 25</a:t>
             </a:r>
             <a:br/>
             <a:r>

--- a/projects/templates/template_pitch_deck/output/pptx/template_template_pitch_short.pptx
+++ b/projects/templates/template_pitch_deck/output/pptx/template_template_pitch_short.pptx
@@ -5431,7 +5431,7 @@
                   <a:srgbClr val="B3131A"/>
                 </a:solidFill>
               </a:rPr>
-              <a:t>153 tests</a:t>
+              <a:t>154 tests</a:t>
             </a:r>
           </a:p>
         </p:txBody>

--- a/projects/templates/template_pitch_deck/output/pptx/template_template_pitch_short.pptx
+++ b/projects/templates/template_pitch_deck/output/pptx/template_template_pitch_short.pptx
@@ -5431,7 +5431,7 @@
                   <a:srgbClr val="B3131A"/>
                 </a:solidFill>
               </a:rPr>
-              <a:t>154 tests</a:t>
+              <a:t>158 tests</a:t>
             </a:r>
           </a:p>
         </p:txBody>
@@ -5464,7 +5464,7 @@
                   <a:srgbClr val="0A0A0A"/>
                 </a:solidFill>
               </a:rPr>
-              <a:t>97.07% coverage on template_template's own source — the same gate every exemplar in the repo must pass.</a:t>
+              <a:t>95.56% coverage on template_template's own source — the same gate every exemplar in the repo must pass.</a:t>
             </a:r>
           </a:p>
         </p:txBody>

--- a/projects/templates/template_pitch_deck/output/pptx/template_template_pitch_short.pptx
+++ b/projects/templates/template_pitch_deck/output/pptx/template_template_pitch_short.pptx
@@ -5420,8 +5420,8 @@
           <a:noFill/>
         </p:spPr>
         <p:txBody>
-          <a:bodyPr wrap="none">
-            <a:spAutoFit/>
+          <a:bodyPr wrap="none" lIns="0" rIns="0" tIns="0" bIns="0">
+            <a:noAutofit/>
           </a:bodyPr>
           <a:lstStyle/>
           <a:p>
@@ -5430,6 +5430,7 @@
                 <a:solidFill>
                   <a:srgbClr val="B3131A"/>
                 </a:solidFill>
+                <a:latin typeface="Helvetica"/>
               </a:rPr>
               <a:t>158 tests</a:t>
             </a:r>

--- a/projects/templates/template_pitch_deck/output/pptx/template_template_pitch_short.pptx
+++ b/projects/templates/template_pitch_deck/output/pptx/template_template_pitch_short.pptx
@@ -5465,7 +5465,7 @@
                   <a:srgbClr val="0A0A0A"/>
                 </a:solidFill>
               </a:rPr>
-              <a:t>95.56% coverage on template_template's own source — the same gate every exemplar in the repo must pass.</a:t>
+              <a:t>95.57% coverage on template_template's own source — the same gate every exemplar in the repo must pass.</a:t>
             </a:r>
           </a:p>
         </p:txBody>

--- a/projects/templates/template_pitch_deck/output/pptx/template_template_pitch_short.pptx
+++ b/projects/templates/template_pitch_deck/output/pptx/template_template_pitch_short.pptx
@@ -5432,7 +5432,7 @@
                 </a:solidFill>
                 <a:latin typeface="Helvetica"/>
               </a:rPr>
-              <a:t>158 tests</a:t>
+              <a:t>161 tests</a:t>
             </a:r>
           </a:p>
         </p:txBody>
@@ -5465,7 +5465,7 @@
                   <a:srgbClr val="0A0A0A"/>
                 </a:solidFill>
               </a:rPr>
-              <a:t>95.57% coverage on template_template's own source — the same gate every exemplar in the repo must pass.</a:t>
+              <a:t>95.55% coverage on template_template's own source — the same gate every exemplar in the repo must pass.</a:t>
             </a:r>
           </a:p>
         </p:txBody>
